--- a/Laboratories/Lab3/pdf_cdf_tutorial_workshop.pptx
+++ b/Laboratories/Lab3/pdf_cdf_tutorial_workshop.pptx
@@ -14,6 +14,8 @@
     <p:sldId id="367" r:id="rId8"/>
     <p:sldId id="362" r:id="rId9"/>
     <p:sldId id="363" r:id="rId10"/>
+    <p:sldId id="368" r:id="rId11"/>
+    <p:sldId id="369" r:id="rId12"/>
   </p:sldIdLst>
   <p:sldSz cx="9144000" cy="6858000" type="screen4x3"/>
   <p:notesSz cx="6858000" cy="9144000"/>
@@ -251,7 +253,7 @@
           <a:p>
             <a:fld id="{4080BEA4-0CCE-5B41-A9DC-637512834633}" type="datetimeFigureOut">
               <a:rPr lang="en-US" smtClean="0"/>
-              <a:t>2/15/26</a:t>
+              <a:t>2/25/26</a:t>
             </a:fld>
             <a:endParaRPr lang="en-US"/>
           </a:p>
@@ -421,7 +423,7 @@
           <a:p>
             <a:fld id="{4080BEA4-0CCE-5B41-A9DC-637512834633}" type="datetimeFigureOut">
               <a:rPr lang="en-US" smtClean="0"/>
-              <a:t>2/15/26</a:t>
+              <a:t>2/25/26</a:t>
             </a:fld>
             <a:endParaRPr lang="en-US"/>
           </a:p>
@@ -601,7 +603,7 @@
           <a:p>
             <a:fld id="{4080BEA4-0CCE-5B41-A9DC-637512834633}" type="datetimeFigureOut">
               <a:rPr lang="en-US" smtClean="0"/>
-              <a:t>2/15/26</a:t>
+              <a:t>2/25/26</a:t>
             </a:fld>
             <a:endParaRPr lang="en-US"/>
           </a:p>
@@ -771,7 +773,7 @@
           <a:p>
             <a:fld id="{4080BEA4-0CCE-5B41-A9DC-637512834633}" type="datetimeFigureOut">
               <a:rPr lang="en-US" smtClean="0"/>
-              <a:t>2/15/26</a:t>
+              <a:t>2/25/26</a:t>
             </a:fld>
             <a:endParaRPr lang="en-US"/>
           </a:p>
@@ -1017,7 +1019,7 @@
           <a:p>
             <a:fld id="{4080BEA4-0CCE-5B41-A9DC-637512834633}" type="datetimeFigureOut">
               <a:rPr lang="en-US" smtClean="0"/>
-              <a:t>2/15/26</a:t>
+              <a:t>2/25/26</a:t>
             </a:fld>
             <a:endParaRPr lang="en-US"/>
           </a:p>
@@ -1249,7 +1251,7 @@
           <a:p>
             <a:fld id="{4080BEA4-0CCE-5B41-A9DC-637512834633}" type="datetimeFigureOut">
               <a:rPr lang="en-US" smtClean="0"/>
-              <a:t>2/15/26</a:t>
+              <a:t>2/25/26</a:t>
             </a:fld>
             <a:endParaRPr lang="en-US"/>
           </a:p>
@@ -1616,7 +1618,7 @@
           <a:p>
             <a:fld id="{4080BEA4-0CCE-5B41-A9DC-637512834633}" type="datetimeFigureOut">
               <a:rPr lang="en-US" smtClean="0"/>
-              <a:t>2/15/26</a:t>
+              <a:t>2/25/26</a:t>
             </a:fld>
             <a:endParaRPr lang="en-US"/>
           </a:p>
@@ -1734,7 +1736,7 @@
           <a:p>
             <a:fld id="{4080BEA4-0CCE-5B41-A9DC-637512834633}" type="datetimeFigureOut">
               <a:rPr lang="en-US" smtClean="0"/>
-              <a:t>2/15/26</a:t>
+              <a:t>2/25/26</a:t>
             </a:fld>
             <a:endParaRPr lang="en-US"/>
           </a:p>
@@ -1829,7 +1831,7 @@
           <a:p>
             <a:fld id="{4080BEA4-0CCE-5B41-A9DC-637512834633}" type="datetimeFigureOut">
               <a:rPr lang="en-US" smtClean="0"/>
-              <a:t>2/15/26</a:t>
+              <a:t>2/25/26</a:t>
             </a:fld>
             <a:endParaRPr lang="en-US"/>
           </a:p>
@@ -2106,7 +2108,7 @@
           <a:p>
             <a:fld id="{4080BEA4-0CCE-5B41-A9DC-637512834633}" type="datetimeFigureOut">
               <a:rPr lang="en-US" smtClean="0"/>
-              <a:t>2/15/26</a:t>
+              <a:t>2/25/26</a:t>
             </a:fld>
             <a:endParaRPr lang="en-US"/>
           </a:p>
@@ -2363,7 +2365,7 @@
           <a:p>
             <a:fld id="{4080BEA4-0CCE-5B41-A9DC-637512834633}" type="datetimeFigureOut">
               <a:rPr lang="en-US" smtClean="0"/>
-              <a:t>2/15/26</a:t>
+              <a:t>2/25/26</a:t>
             </a:fld>
             <a:endParaRPr lang="en-US"/>
           </a:p>
@@ -2576,7 +2578,7 @@
           <a:p>
             <a:fld id="{4080BEA4-0CCE-5B41-A9DC-637512834633}" type="datetimeFigureOut">
               <a:rPr lang="en-US" smtClean="0"/>
-              <a:t>2/15/26</a:t>
+              <a:t>2/25/26</a:t>
             </a:fld>
             <a:endParaRPr lang="en-US"/>
           </a:p>
@@ -5317,6 +5319,1978 @@
       <p:bldP spid="29" grpId="0" animBg="1"/>
       <p:bldP spid="30" grpId="0"/>
     </p:bldLst>
+  </p:timing>
+</p:sld>
+</file>
+
+<file path=ppt/slides/slide10.xml><?xml version="1.0" encoding="utf-8"?>
+<p:sld xmlns:a="http://schemas.openxmlformats.org/drawingml/2006/main" xmlns:r="http://schemas.openxmlformats.org/officeDocument/2006/relationships" xmlns:p="http://schemas.openxmlformats.org/presentationml/2006/main">
+  <p:cSld>
+    <p:spTree>
+      <p:nvGrpSpPr>
+        <p:cNvPr id="1" name=""/>
+        <p:cNvGrpSpPr/>
+        <p:nvPr/>
+      </p:nvGrpSpPr>
+      <p:grpSpPr>
+        <a:xfrm>
+          <a:off x="0" y="0"/>
+          <a:ext cx="0" cy="0"/>
+          <a:chOff x="0" y="0"/>
+          <a:chExt cx="0" cy="0"/>
+        </a:xfrm>
+      </p:grpSpPr>
+      <p:sp>
+        <p:nvSpPr>
+          <p:cNvPr id="4" name="Rectangle 1">
+            <a:extLst>
+              <a:ext uri="{FF2B5EF4-FFF2-40B4-BE49-F238E27FC236}">
+                <a16:creationId xmlns:a16="http://schemas.microsoft.com/office/drawing/2014/main" id="{5B787007-B2B7-69F3-6670-8B27E8D20A1F}"/>
+              </a:ext>
+            </a:extLst>
+          </p:cNvPr>
+          <p:cNvSpPr>
+            <a:spLocks noChangeArrowheads="1"/>
+          </p:cNvSpPr>
+          <p:nvPr/>
+        </p:nvSpPr>
+        <p:spPr bwMode="auto">
+          <a:xfrm>
+            <a:off x="0" y="279102"/>
+            <a:ext cx="9104312" cy="871324"/>
+          </a:xfrm>
+          <a:prstGeom prst="rect">
+            <a:avLst/>
+          </a:prstGeom>
+          <a:noFill/>
+          <a:ln w="9525">
+            <a:noFill/>
+            <a:round/>
+            <a:headEnd/>
+            <a:tailEnd/>
+          </a:ln>
+        </p:spPr>
+        <p:txBody>
+          <a:bodyPr lIns="0" tIns="0" rIns="0" bIns="0" anchor="ctr"/>
+          <a:lstStyle/>
+          <a:p>
+            <a:pPr algn="ctr" hangingPunct="0">
+              <a:lnSpc>
+                <a:spcPct val="98000"/>
+              </a:lnSpc>
+              <a:buSzPct val="45000"/>
+              <a:buFont typeface="Wingdings" pitchFamily="2" charset="2"/>
+              <a:buNone/>
+              <a:tabLst>
+                <a:tab pos="0" algn="l"/>
+                <a:tab pos="914400" algn="l"/>
+                <a:tab pos="1828800" algn="l"/>
+                <a:tab pos="2743200" algn="l"/>
+                <a:tab pos="3657600" algn="l"/>
+                <a:tab pos="4572000" algn="l"/>
+                <a:tab pos="5486400" algn="l"/>
+                <a:tab pos="6400800" algn="l"/>
+                <a:tab pos="7315200" algn="l"/>
+                <a:tab pos="8229600" algn="l"/>
+                <a:tab pos="9144000" algn="l"/>
+                <a:tab pos="10058400" algn="l"/>
+              </a:tabLst>
+            </a:pPr>
+            <a:r>
+              <a:rPr lang="en-US" sz="4000" dirty="0">
+                <a:solidFill>
+                  <a:schemeClr val="tx1"/>
+                </a:solidFill>
+                <a:latin typeface="Times New Roman" pitchFamily="18" charset="0"/>
+                <a:cs typeface="Times New Roman" pitchFamily="18" charset="0"/>
+              </a:rPr>
+              <a:t>Example</a:t>
+            </a:r>
+          </a:p>
+        </p:txBody>
+      </p:sp>
+      <p:pic>
+        <p:nvPicPr>
+          <p:cNvPr id="5" name="Picture 2">
+            <a:extLst>
+              <a:ext uri="{FF2B5EF4-FFF2-40B4-BE49-F238E27FC236}">
+                <a16:creationId xmlns:a16="http://schemas.microsoft.com/office/drawing/2014/main" id="{61D5EF5B-7732-6E47-2195-8DE319F3B995}"/>
+              </a:ext>
+            </a:extLst>
+          </p:cNvPr>
+          <p:cNvPicPr>
+            <a:picLocks noChangeAspect="1" noChangeArrowheads="1"/>
+          </p:cNvPicPr>
+          <p:nvPr/>
+        </p:nvPicPr>
+        <p:blipFill>
+          <a:blip r:embed="rId2" cstate="print"/>
+          <a:srcRect/>
+          <a:stretch>
+            <a:fillRect/>
+          </a:stretch>
+        </p:blipFill>
+        <p:spPr bwMode="auto">
+          <a:xfrm>
+            <a:off x="484188" y="76200"/>
+            <a:ext cx="8202612" cy="239712"/>
+          </a:xfrm>
+          <a:prstGeom prst="rect">
+            <a:avLst/>
+          </a:prstGeom>
+          <a:noFill/>
+          <a:ln w="9525">
+            <a:noFill/>
+            <a:round/>
+            <a:headEnd/>
+            <a:tailEnd/>
+          </a:ln>
+        </p:spPr>
+      </p:pic>
+      <p:sp>
+        <p:nvSpPr>
+          <p:cNvPr id="6" name="Rectangle 5">
+            <a:extLst>
+              <a:ext uri="{FF2B5EF4-FFF2-40B4-BE49-F238E27FC236}">
+                <a16:creationId xmlns:a16="http://schemas.microsoft.com/office/drawing/2014/main" id="{8912D8CF-FBC8-52DA-35F0-91AC64587FC1}"/>
+              </a:ext>
+            </a:extLst>
+          </p:cNvPr>
+          <p:cNvSpPr/>
+          <p:nvPr/>
+        </p:nvSpPr>
+        <p:spPr>
+          <a:xfrm>
+            <a:off x="23586" y="1262124"/>
+            <a:ext cx="9144000" cy="830997"/>
+          </a:xfrm>
+          <a:prstGeom prst="rect">
+            <a:avLst/>
+          </a:prstGeom>
+        </p:spPr>
+        <p:txBody>
+          <a:bodyPr wrap="square">
+            <a:spAutoFit/>
+          </a:bodyPr>
+          <a:lstStyle/>
+          <a:p>
+            <a:r>
+              <a:rPr lang="en-US" sz="2400" dirty="0">
+                <a:latin typeface="Times New Roman"/>
+                <a:cs typeface="Times New Roman"/>
+              </a:rPr>
+              <a:t>Consider the shotgun pellet spread (</a:t>
+            </a:r>
+            <a:r>
+              <a:rPr lang="en-US" sz="2400" dirty="0" err="1">
+                <a:latin typeface="Times New Roman"/>
+                <a:cs typeface="Times New Roman"/>
+              </a:rPr>
+              <a:t>sqrt.area</a:t>
+            </a:r>
+            <a:r>
+              <a:rPr lang="en-US" sz="2400" dirty="0">
+                <a:latin typeface="Times New Roman"/>
+                <a:cs typeface="Times New Roman"/>
+              </a:rPr>
+              <a:t>) vs. distance data in </a:t>
+            </a:r>
+            <a:r>
+              <a:rPr lang="en-US" sz="2400" b="1" dirty="0" err="1">
+                <a:latin typeface="Courier New" panose="02070309020205020404" pitchFamily="49" charset="0"/>
+                <a:cs typeface="Courier New" panose="02070309020205020404" pitchFamily="49" charset="0"/>
+              </a:rPr>
+              <a:t>sgr.tsim</a:t>
+            </a:r>
+            <a:r>
+              <a:rPr lang="en-US" sz="2400" dirty="0">
+                <a:latin typeface="Times New Roman"/>
+                <a:cs typeface="Times New Roman"/>
+              </a:rPr>
+              <a:t> of </a:t>
+            </a:r>
+            <a:r>
+              <a:rPr lang="en-US" sz="2400" b="1" dirty="0" err="1">
+                <a:latin typeface="Courier New" panose="02070309020205020404" pitchFamily="49" charset="0"/>
+                <a:cs typeface="Courier New" panose="02070309020205020404" pitchFamily="49" charset="0"/>
+              </a:rPr>
+              <a:t>frequtils</a:t>
+            </a:r>
+            <a:r>
+              <a:rPr lang="en-US" sz="2400" dirty="0">
+                <a:latin typeface="Times New Roman"/>
+                <a:cs typeface="Times New Roman"/>
+              </a:rPr>
+              <a:t>:</a:t>
+            </a:r>
+            <a:endParaRPr lang="en-US" sz="2400" i="1" dirty="0">
+              <a:latin typeface="Times New Roman"/>
+              <a:cs typeface="Times New Roman"/>
+            </a:endParaRPr>
+          </a:p>
+        </p:txBody>
+      </p:sp>
+      <p:sp>
+        <p:nvSpPr>
+          <p:cNvPr id="7" name="Rectangle 6">
+            <a:extLst>
+              <a:ext uri="{FF2B5EF4-FFF2-40B4-BE49-F238E27FC236}">
+                <a16:creationId xmlns:a16="http://schemas.microsoft.com/office/drawing/2014/main" id="{DCE4F4DA-10B3-5CC5-40B3-3EA4F492697E}"/>
+              </a:ext>
+            </a:extLst>
+          </p:cNvPr>
+          <p:cNvSpPr/>
+          <p:nvPr/>
+        </p:nvSpPr>
+        <p:spPr>
+          <a:xfrm>
+            <a:off x="484188" y="2575143"/>
+            <a:ext cx="8091714" cy="2462213"/>
+          </a:xfrm>
+          <a:prstGeom prst="rect">
+            <a:avLst/>
+          </a:prstGeom>
+        </p:spPr>
+        <p:txBody>
+          <a:bodyPr wrap="square">
+            <a:spAutoFit/>
+          </a:bodyPr>
+          <a:lstStyle/>
+          <a:p>
+            <a:pPr marL="457200" indent="-457200">
+              <a:buAutoNum type="alphaLcPeriod"/>
+            </a:pPr>
+            <a:r>
+              <a:rPr lang="en-US" sz="2200" dirty="0">
+                <a:latin typeface="Times New Roman"/>
+                <a:cs typeface="Times New Roman"/>
+              </a:rPr>
+              <a:t>Plot the PMFs of the pellet spread at 10ft for the Stevens and Remington guns</a:t>
+            </a:r>
+          </a:p>
+          <a:p>
+            <a:pPr marL="457200" indent="-457200">
+              <a:buAutoNum type="alphaLcPeriod"/>
+            </a:pPr>
+            <a:r>
+              <a:rPr lang="en-US" sz="2200" dirty="0">
+                <a:latin typeface="Times New Roman"/>
+                <a:cs typeface="Times New Roman"/>
+              </a:rPr>
+              <a:t>Compare the distributions of the Stevens and Remington datasets at 10ft with a QQ-plot. What are your observations and conclusions about the similarity of the two dataset's distributions?</a:t>
+            </a:r>
+          </a:p>
+          <a:p>
+            <a:pPr marL="457200" indent="-457200">
+              <a:buAutoNum type="alphaLcPeriod"/>
+            </a:pPr>
+            <a:r>
+              <a:rPr lang="en-US" sz="2200" dirty="0">
+                <a:latin typeface="Times New Roman"/>
+                <a:cs typeface="Times New Roman"/>
+              </a:rPr>
+              <a:t>Plot the </a:t>
+            </a:r>
+            <a:r>
+              <a:rPr lang="en-US" sz="2200" dirty="0" err="1">
+                <a:latin typeface="Times New Roman"/>
+                <a:cs typeface="Times New Roman"/>
+              </a:rPr>
+              <a:t>ecdf’s</a:t>
+            </a:r>
+            <a:r>
+              <a:rPr lang="en-US" sz="2200" dirty="0">
+                <a:latin typeface="Times New Roman"/>
+                <a:cs typeface="Times New Roman"/>
+              </a:rPr>
+              <a:t> of the Stevens and Remington datasets at 10ft and overlay them. Do your conclusions change from b.? </a:t>
+            </a:r>
+          </a:p>
+        </p:txBody>
+      </p:sp>
+    </p:spTree>
+    <p:extLst>
+      <p:ext uri="{BB962C8B-B14F-4D97-AF65-F5344CB8AC3E}">
+        <p14:creationId xmlns:p14="http://schemas.microsoft.com/office/powerpoint/2010/main" val="1827191089"/>
+      </p:ext>
+    </p:extLst>
+  </p:cSld>
+  <p:clrMapOvr>
+    <a:masterClrMapping/>
+  </p:clrMapOvr>
+</p:sld>
+</file>
+
+<file path=ppt/slides/slide11.xml><?xml version="1.0" encoding="utf-8"?>
+<p:sld xmlns:a="http://schemas.openxmlformats.org/drawingml/2006/main" xmlns:r="http://schemas.openxmlformats.org/officeDocument/2006/relationships" xmlns:p="http://schemas.openxmlformats.org/presentationml/2006/main">
+  <p:cSld>
+    <p:spTree>
+      <p:nvGrpSpPr>
+        <p:cNvPr id="1" name=""/>
+        <p:cNvGrpSpPr/>
+        <p:nvPr/>
+      </p:nvGrpSpPr>
+      <p:grpSpPr>
+        <a:xfrm>
+          <a:off x="0" y="0"/>
+          <a:ext cx="0" cy="0"/>
+          <a:chOff x="0" y="0"/>
+          <a:chExt cx="0" cy="0"/>
+        </a:xfrm>
+      </p:grpSpPr>
+      <p:pic>
+        <p:nvPicPr>
+          <p:cNvPr id="4" name="Picture 2">
+            <a:extLst>
+              <a:ext uri="{FF2B5EF4-FFF2-40B4-BE49-F238E27FC236}">
+                <a16:creationId xmlns:a16="http://schemas.microsoft.com/office/drawing/2014/main" id="{106B9401-9008-0E48-9BA3-9E0C90A7E15B}"/>
+              </a:ext>
+            </a:extLst>
+          </p:cNvPr>
+          <p:cNvPicPr>
+            <a:picLocks noChangeAspect="1" noChangeArrowheads="1"/>
+          </p:cNvPicPr>
+          <p:nvPr/>
+        </p:nvPicPr>
+        <p:blipFill>
+          <a:blip r:embed="rId2" cstate="print"/>
+          <a:srcRect/>
+          <a:stretch>
+            <a:fillRect/>
+          </a:stretch>
+        </p:blipFill>
+        <p:spPr bwMode="auto">
+          <a:xfrm>
+            <a:off x="484188" y="76200"/>
+            <a:ext cx="8202612" cy="239712"/>
+          </a:xfrm>
+          <a:prstGeom prst="rect">
+            <a:avLst/>
+          </a:prstGeom>
+          <a:noFill/>
+          <a:ln w="9525">
+            <a:noFill/>
+            <a:round/>
+            <a:headEnd/>
+            <a:tailEnd/>
+          </a:ln>
+        </p:spPr>
+      </p:pic>
+      <p:sp>
+        <p:nvSpPr>
+          <p:cNvPr id="5" name="Rectangle 4">
+            <a:extLst>
+              <a:ext uri="{FF2B5EF4-FFF2-40B4-BE49-F238E27FC236}">
+                <a16:creationId xmlns:a16="http://schemas.microsoft.com/office/drawing/2014/main" id="{47F13366-7309-4E66-6583-5B1FDEEF1ACA}"/>
+              </a:ext>
+            </a:extLst>
+          </p:cNvPr>
+          <p:cNvSpPr/>
+          <p:nvPr/>
+        </p:nvSpPr>
+        <p:spPr>
+          <a:xfrm>
+            <a:off x="345508" y="497736"/>
+            <a:ext cx="8452983" cy="6124754"/>
+          </a:xfrm>
+          <a:prstGeom prst="rect">
+            <a:avLst/>
+          </a:prstGeom>
+          <a:solidFill>
+            <a:srgbClr val="000C78"/>
+          </a:solidFill>
+        </p:spPr>
+        <p:txBody>
+          <a:bodyPr wrap="square">
+            <a:spAutoFit/>
+          </a:bodyPr>
+          <a:lstStyle/>
+          <a:p>
+            <a:r>
+              <a:rPr lang="fr-FR" sz="1400" dirty="0" err="1">
+                <a:solidFill>
+                  <a:schemeClr val="accent2"/>
+                </a:solidFill>
+                <a:latin typeface="Courier"/>
+                <a:cs typeface="Courier"/>
+              </a:rPr>
+              <a:t>library</a:t>
+            </a:r>
+            <a:r>
+              <a:rPr lang="fr-FR" sz="1400" dirty="0">
+                <a:solidFill>
+                  <a:schemeClr val="bg1"/>
+                </a:solidFill>
+                <a:latin typeface="Courier"/>
+                <a:cs typeface="Courier"/>
+              </a:rPr>
+              <a:t>(</a:t>
+            </a:r>
+            <a:r>
+              <a:rPr lang="fr-FR" sz="1400" dirty="0" err="1">
+                <a:solidFill>
+                  <a:schemeClr val="bg1"/>
+                </a:solidFill>
+                <a:latin typeface="Courier"/>
+                <a:cs typeface="Courier"/>
+              </a:rPr>
+              <a:t>frequtils</a:t>
+            </a:r>
+            <a:r>
+              <a:rPr lang="fr-FR" sz="1400" dirty="0">
+                <a:solidFill>
+                  <a:schemeClr val="bg1"/>
+                </a:solidFill>
+                <a:latin typeface="Courier"/>
+                <a:cs typeface="Courier"/>
+              </a:rPr>
+              <a:t>)</a:t>
+            </a:r>
+          </a:p>
+          <a:p>
+            <a:endParaRPr lang="fr-FR" sz="1400" dirty="0">
+              <a:solidFill>
+                <a:schemeClr val="bg1"/>
+              </a:solidFill>
+              <a:latin typeface="Courier"/>
+              <a:cs typeface="Courier"/>
+            </a:endParaRPr>
+          </a:p>
+          <a:p>
+            <a:r>
+              <a:rPr lang="fr-FR" sz="1400" dirty="0">
+                <a:solidFill>
+                  <a:schemeClr val="bg1"/>
+                </a:solidFill>
+                <a:latin typeface="Courier"/>
+                <a:cs typeface="Courier"/>
+              </a:rPr>
+              <a:t>data(</a:t>
+            </a:r>
+            <a:r>
+              <a:rPr lang="fr-FR" sz="1400" dirty="0">
+                <a:solidFill>
+                  <a:schemeClr val="accent6"/>
+                </a:solidFill>
+                <a:latin typeface="Courier"/>
+                <a:cs typeface="Courier"/>
+              </a:rPr>
+              <a:t>"</a:t>
+            </a:r>
+            <a:r>
+              <a:rPr lang="fr-FR" sz="1400" dirty="0" err="1">
+                <a:solidFill>
+                  <a:schemeClr val="accent6"/>
+                </a:solidFill>
+                <a:latin typeface="Courier"/>
+                <a:cs typeface="Courier"/>
+              </a:rPr>
+              <a:t>sgr.tsim</a:t>
+            </a:r>
+            <a:r>
+              <a:rPr lang="fr-FR" sz="1400" dirty="0">
+                <a:solidFill>
+                  <a:schemeClr val="accent6"/>
+                </a:solidFill>
+                <a:latin typeface="Courier"/>
+                <a:cs typeface="Courier"/>
+              </a:rPr>
+              <a:t>"</a:t>
+            </a:r>
+            <a:r>
+              <a:rPr lang="fr-FR" sz="1400" dirty="0">
+                <a:solidFill>
+                  <a:schemeClr val="bg1"/>
+                </a:solidFill>
+                <a:latin typeface="Courier"/>
+                <a:cs typeface="Courier"/>
+              </a:rPr>
+              <a:t>)</a:t>
+            </a:r>
+          </a:p>
+          <a:p>
+            <a:endParaRPr lang="fr-FR" sz="1400" dirty="0">
+              <a:solidFill>
+                <a:schemeClr val="bg1"/>
+              </a:solidFill>
+              <a:latin typeface="Courier"/>
+              <a:cs typeface="Courier"/>
+            </a:endParaRPr>
+          </a:p>
+          <a:p>
+            <a:r>
+              <a:rPr lang="fr-FR" sz="1400" dirty="0" err="1">
+                <a:solidFill>
+                  <a:schemeClr val="bg1"/>
+                </a:solidFill>
+                <a:latin typeface="Courier"/>
+                <a:cs typeface="Courier"/>
+              </a:rPr>
+              <a:t>st.idxs</a:t>
+            </a:r>
+            <a:r>
+              <a:rPr lang="fr-FR" sz="1400" dirty="0">
+                <a:solidFill>
+                  <a:schemeClr val="bg1"/>
+                </a:solidFill>
+                <a:latin typeface="Courier"/>
+                <a:cs typeface="Courier"/>
+              </a:rPr>
+              <a:t> &lt;- </a:t>
+            </a:r>
+            <a:r>
+              <a:rPr lang="fr-FR" sz="1400" dirty="0" err="1">
+                <a:solidFill>
+                  <a:schemeClr val="bg1"/>
+                </a:solidFill>
+                <a:latin typeface="Courier"/>
+                <a:cs typeface="Courier"/>
+              </a:rPr>
+              <a:t>which</a:t>
+            </a:r>
+            <a:r>
+              <a:rPr lang="fr-FR" sz="1400" dirty="0">
+                <a:solidFill>
+                  <a:schemeClr val="bg1"/>
+                </a:solidFill>
+                <a:latin typeface="Courier"/>
+                <a:cs typeface="Courier"/>
+              </a:rPr>
+              <a:t>(</a:t>
+            </a:r>
+            <a:r>
+              <a:rPr lang="fr-FR" sz="1400" dirty="0" err="1">
+                <a:solidFill>
+                  <a:schemeClr val="bg1"/>
+                </a:solidFill>
+                <a:latin typeface="Courier"/>
+                <a:cs typeface="Courier"/>
+              </a:rPr>
+              <a:t>sgr.tsim$gun.lbl</a:t>
+            </a:r>
+            <a:r>
+              <a:rPr lang="fr-FR" sz="1400" dirty="0">
+                <a:solidFill>
+                  <a:schemeClr val="bg1"/>
+                </a:solidFill>
+                <a:latin typeface="Courier"/>
+                <a:cs typeface="Courier"/>
+              </a:rPr>
+              <a:t>==</a:t>
+            </a:r>
+            <a:r>
+              <a:rPr lang="fr-FR" sz="1400" dirty="0">
+                <a:solidFill>
+                  <a:schemeClr val="accent6"/>
+                </a:solidFill>
+                <a:latin typeface="Courier"/>
+                <a:cs typeface="Courier"/>
+              </a:rPr>
+              <a:t>"Stevens"</a:t>
+            </a:r>
+            <a:r>
+              <a:rPr lang="fr-FR" sz="1400" dirty="0">
+                <a:solidFill>
+                  <a:schemeClr val="bg1"/>
+                </a:solidFill>
+                <a:latin typeface="Courier"/>
+                <a:cs typeface="Courier"/>
+              </a:rPr>
+              <a:t>)</a:t>
+            </a:r>
+          </a:p>
+          <a:p>
+            <a:r>
+              <a:rPr lang="fr-FR" sz="1400" dirty="0" err="1">
+                <a:solidFill>
+                  <a:schemeClr val="bg1"/>
+                </a:solidFill>
+                <a:latin typeface="Courier"/>
+                <a:cs typeface="Courier"/>
+              </a:rPr>
+              <a:t>rm.idxs</a:t>
+            </a:r>
+            <a:r>
+              <a:rPr lang="fr-FR" sz="1400" dirty="0">
+                <a:solidFill>
+                  <a:schemeClr val="bg1"/>
+                </a:solidFill>
+                <a:latin typeface="Courier"/>
+                <a:cs typeface="Courier"/>
+              </a:rPr>
+              <a:t> &lt;- </a:t>
+            </a:r>
+            <a:r>
+              <a:rPr lang="fr-FR" sz="1400" dirty="0" err="1">
+                <a:solidFill>
+                  <a:schemeClr val="bg1"/>
+                </a:solidFill>
+                <a:latin typeface="Courier"/>
+                <a:cs typeface="Courier"/>
+              </a:rPr>
+              <a:t>which</a:t>
+            </a:r>
+            <a:r>
+              <a:rPr lang="fr-FR" sz="1400" dirty="0">
+                <a:solidFill>
+                  <a:schemeClr val="bg1"/>
+                </a:solidFill>
+                <a:latin typeface="Courier"/>
+                <a:cs typeface="Courier"/>
+              </a:rPr>
+              <a:t>(</a:t>
+            </a:r>
+            <a:r>
+              <a:rPr lang="fr-FR" sz="1400" dirty="0" err="1">
+                <a:solidFill>
+                  <a:schemeClr val="bg1"/>
+                </a:solidFill>
+                <a:latin typeface="Courier"/>
+                <a:cs typeface="Courier"/>
+              </a:rPr>
+              <a:t>sgr.tsim$gun.lbl</a:t>
+            </a:r>
+            <a:r>
+              <a:rPr lang="fr-FR" sz="1400" dirty="0">
+                <a:solidFill>
+                  <a:schemeClr val="bg1"/>
+                </a:solidFill>
+                <a:latin typeface="Courier"/>
+                <a:cs typeface="Courier"/>
+              </a:rPr>
+              <a:t>==</a:t>
+            </a:r>
+            <a:r>
+              <a:rPr lang="fr-FR" sz="1400" dirty="0">
+                <a:solidFill>
+                  <a:schemeClr val="accent6"/>
+                </a:solidFill>
+                <a:latin typeface="Courier"/>
+                <a:cs typeface="Courier"/>
+              </a:rPr>
+              <a:t>"Remington"</a:t>
+            </a:r>
+            <a:r>
+              <a:rPr lang="fr-FR" sz="1400" dirty="0">
+                <a:solidFill>
+                  <a:schemeClr val="bg1"/>
+                </a:solidFill>
+                <a:latin typeface="Courier"/>
+                <a:cs typeface="Courier"/>
+              </a:rPr>
+              <a:t>)</a:t>
+            </a:r>
+          </a:p>
+          <a:p>
+            <a:endParaRPr lang="fr-FR" sz="1400" dirty="0">
+              <a:solidFill>
+                <a:schemeClr val="bg1"/>
+              </a:solidFill>
+              <a:latin typeface="Courier"/>
+              <a:cs typeface="Courier"/>
+            </a:endParaRPr>
+          </a:p>
+          <a:p>
+            <a:r>
+              <a:rPr lang="fr-FR" sz="1400" dirty="0">
+                <a:solidFill>
+                  <a:schemeClr val="bg1"/>
+                </a:solidFill>
+                <a:latin typeface="Courier"/>
+                <a:cs typeface="Courier"/>
+              </a:rPr>
+              <a:t>st &lt;- </a:t>
+            </a:r>
+            <a:r>
+              <a:rPr lang="fr-FR" sz="1400" dirty="0" err="1">
+                <a:solidFill>
+                  <a:schemeClr val="bg1"/>
+                </a:solidFill>
+                <a:latin typeface="Courier"/>
+                <a:cs typeface="Courier"/>
+              </a:rPr>
+              <a:t>sgr.tsim</a:t>
+            </a:r>
+            <a:r>
+              <a:rPr lang="fr-FR" sz="1400" dirty="0">
+                <a:solidFill>
+                  <a:schemeClr val="bg1"/>
+                </a:solidFill>
+                <a:latin typeface="Courier"/>
+                <a:cs typeface="Courier"/>
+              </a:rPr>
+              <a:t>[</a:t>
+            </a:r>
+            <a:r>
+              <a:rPr lang="fr-FR" sz="1400" dirty="0" err="1">
+                <a:solidFill>
+                  <a:schemeClr val="bg1"/>
+                </a:solidFill>
+                <a:latin typeface="Courier"/>
+                <a:cs typeface="Courier"/>
+              </a:rPr>
+              <a:t>st.idxs</a:t>
+            </a:r>
+            <a:r>
+              <a:rPr lang="fr-FR" sz="1400" dirty="0">
+                <a:solidFill>
+                  <a:schemeClr val="bg1"/>
+                </a:solidFill>
+                <a:latin typeface="Courier"/>
+                <a:cs typeface="Courier"/>
+              </a:rPr>
+              <a:t>, 1] </a:t>
+            </a:r>
+            <a:r>
+              <a:rPr lang="fr-FR" sz="1400" dirty="0">
+                <a:solidFill>
+                  <a:srgbClr val="FFFF00"/>
+                </a:solidFill>
+                <a:latin typeface="Courier"/>
+                <a:cs typeface="Courier"/>
+              </a:rPr>
+              <a:t># X10.ft data Stevens </a:t>
+            </a:r>
+          </a:p>
+          <a:p>
+            <a:r>
+              <a:rPr lang="fr-FR" sz="1400" dirty="0" err="1">
+                <a:solidFill>
+                  <a:schemeClr val="bg1"/>
+                </a:solidFill>
+                <a:latin typeface="Courier"/>
+                <a:cs typeface="Courier"/>
+              </a:rPr>
+              <a:t>rm</a:t>
+            </a:r>
+            <a:r>
+              <a:rPr lang="fr-FR" sz="1400" dirty="0">
+                <a:solidFill>
+                  <a:schemeClr val="bg1"/>
+                </a:solidFill>
+                <a:latin typeface="Courier"/>
+                <a:cs typeface="Courier"/>
+              </a:rPr>
+              <a:t> &lt;- </a:t>
+            </a:r>
+            <a:r>
+              <a:rPr lang="fr-FR" sz="1400" dirty="0" err="1">
+                <a:solidFill>
+                  <a:schemeClr val="bg1"/>
+                </a:solidFill>
+                <a:latin typeface="Courier"/>
+                <a:cs typeface="Courier"/>
+              </a:rPr>
+              <a:t>sgr.tsim</a:t>
+            </a:r>
+            <a:r>
+              <a:rPr lang="fr-FR" sz="1400" dirty="0">
+                <a:solidFill>
+                  <a:schemeClr val="bg1"/>
+                </a:solidFill>
+                <a:latin typeface="Courier"/>
+                <a:cs typeface="Courier"/>
+              </a:rPr>
+              <a:t>[</a:t>
+            </a:r>
+            <a:r>
+              <a:rPr lang="fr-FR" sz="1400" dirty="0" err="1">
+                <a:solidFill>
+                  <a:schemeClr val="bg1"/>
+                </a:solidFill>
+                <a:latin typeface="Courier"/>
+                <a:cs typeface="Courier"/>
+              </a:rPr>
+              <a:t>rm.idxs</a:t>
+            </a:r>
+            <a:r>
+              <a:rPr lang="fr-FR" sz="1400" dirty="0">
+                <a:solidFill>
+                  <a:schemeClr val="bg1"/>
+                </a:solidFill>
+                <a:latin typeface="Courier"/>
+                <a:cs typeface="Courier"/>
+              </a:rPr>
+              <a:t>, 1] </a:t>
+            </a:r>
+            <a:r>
+              <a:rPr lang="fr-FR" sz="1400" dirty="0">
+                <a:solidFill>
+                  <a:srgbClr val="FFFF00"/>
+                </a:solidFill>
+                <a:latin typeface="Courier"/>
+                <a:cs typeface="Courier"/>
+              </a:rPr>
+              <a:t># X10.ft data Remington</a:t>
+            </a:r>
+          </a:p>
+          <a:p>
+            <a:endParaRPr lang="fr-FR" sz="1400" dirty="0">
+              <a:solidFill>
+                <a:schemeClr val="bg1"/>
+              </a:solidFill>
+              <a:latin typeface="Courier"/>
+              <a:cs typeface="Courier"/>
+            </a:endParaRPr>
+          </a:p>
+          <a:p>
+            <a:r>
+              <a:rPr lang="fr-FR" sz="1400" dirty="0">
+                <a:solidFill>
+                  <a:srgbClr val="FFFF00"/>
+                </a:solidFill>
+                <a:latin typeface="Courier"/>
+                <a:cs typeface="Courier"/>
+              </a:rPr>
+              <a:t># </a:t>
+            </a:r>
+            <a:r>
+              <a:rPr lang="fr-FR" sz="1400" dirty="0" err="1">
+                <a:solidFill>
+                  <a:srgbClr val="FFFF00"/>
+                </a:solidFill>
+                <a:latin typeface="Courier"/>
+                <a:cs typeface="Courier"/>
+              </a:rPr>
+              <a:t>Datasets</a:t>
+            </a:r>
+            <a:r>
+              <a:rPr lang="fr-FR" sz="1400" dirty="0">
+                <a:solidFill>
+                  <a:srgbClr val="FFFF00"/>
+                </a:solidFill>
+                <a:latin typeface="Courier"/>
+                <a:cs typeface="Courier"/>
+              </a:rPr>
+              <a:t> distributions (</a:t>
+            </a:r>
+            <a:r>
+              <a:rPr lang="fr-FR" sz="1400" dirty="0" err="1">
+                <a:solidFill>
+                  <a:srgbClr val="FFFF00"/>
+                </a:solidFill>
+                <a:latin typeface="Courier"/>
+                <a:cs typeface="Courier"/>
+              </a:rPr>
+              <a:t>PMFs</a:t>
+            </a:r>
+            <a:r>
+              <a:rPr lang="fr-FR" sz="1400" dirty="0">
+                <a:solidFill>
+                  <a:srgbClr val="FFFF00"/>
+                </a:solidFill>
+                <a:latin typeface="Courier"/>
+                <a:cs typeface="Courier"/>
+              </a:rPr>
+              <a:t>)</a:t>
+            </a:r>
+          </a:p>
+          <a:p>
+            <a:r>
+              <a:rPr lang="fr-FR" sz="1400" dirty="0" err="1">
+                <a:solidFill>
+                  <a:schemeClr val="bg1"/>
+                </a:solidFill>
+                <a:latin typeface="Courier"/>
+                <a:cs typeface="Courier"/>
+              </a:rPr>
+              <a:t>hist</a:t>
+            </a:r>
+            <a:r>
+              <a:rPr lang="fr-FR" sz="1400" dirty="0">
+                <a:solidFill>
+                  <a:schemeClr val="bg1"/>
+                </a:solidFill>
+                <a:latin typeface="Courier"/>
+                <a:cs typeface="Courier"/>
+              </a:rPr>
+              <a:t>(st)</a:t>
+            </a:r>
+          </a:p>
+          <a:p>
+            <a:r>
+              <a:rPr lang="fr-FR" sz="1400" dirty="0" err="1">
+                <a:solidFill>
+                  <a:schemeClr val="bg1"/>
+                </a:solidFill>
+                <a:latin typeface="Courier"/>
+                <a:cs typeface="Courier"/>
+              </a:rPr>
+              <a:t>hist</a:t>
+            </a:r>
+            <a:r>
+              <a:rPr lang="fr-FR" sz="1400" dirty="0">
+                <a:solidFill>
+                  <a:schemeClr val="bg1"/>
+                </a:solidFill>
+                <a:latin typeface="Courier"/>
+                <a:cs typeface="Courier"/>
+              </a:rPr>
+              <a:t>(</a:t>
+            </a:r>
+            <a:r>
+              <a:rPr lang="fr-FR" sz="1400" dirty="0" err="1">
+                <a:solidFill>
+                  <a:schemeClr val="bg1"/>
+                </a:solidFill>
+                <a:latin typeface="Courier"/>
+                <a:cs typeface="Courier"/>
+              </a:rPr>
+              <a:t>rm</a:t>
+            </a:r>
+            <a:r>
+              <a:rPr lang="fr-FR" sz="1400" dirty="0">
+                <a:solidFill>
+                  <a:schemeClr val="bg1"/>
+                </a:solidFill>
+                <a:latin typeface="Courier"/>
+                <a:cs typeface="Courier"/>
+              </a:rPr>
+              <a:t>)</a:t>
+            </a:r>
+          </a:p>
+          <a:p>
+            <a:endParaRPr lang="fr-FR" sz="1400" dirty="0">
+              <a:solidFill>
+                <a:schemeClr val="bg1"/>
+              </a:solidFill>
+              <a:latin typeface="Courier"/>
+              <a:cs typeface="Courier"/>
+            </a:endParaRPr>
+          </a:p>
+          <a:p>
+            <a:r>
+              <a:rPr lang="fr-FR" sz="1400" dirty="0">
+                <a:solidFill>
+                  <a:srgbClr val="FFFF00"/>
+                </a:solidFill>
+                <a:latin typeface="Courier"/>
+                <a:cs typeface="Courier"/>
+              </a:rPr>
+              <a:t># QQ-plot to compare </a:t>
+            </a:r>
+            <a:r>
+              <a:rPr lang="fr-FR" sz="1400" dirty="0" err="1">
+                <a:solidFill>
+                  <a:srgbClr val="FFFF00"/>
+                </a:solidFill>
+                <a:latin typeface="Courier"/>
+                <a:cs typeface="Courier"/>
+              </a:rPr>
+              <a:t>datasets</a:t>
+            </a:r>
+            <a:r>
+              <a:rPr lang="fr-FR" sz="1400" dirty="0">
+                <a:solidFill>
+                  <a:srgbClr val="FFFF00"/>
+                </a:solidFill>
+                <a:latin typeface="Courier"/>
+                <a:cs typeface="Courier"/>
+              </a:rPr>
+              <a:t> distributions:</a:t>
+            </a:r>
+          </a:p>
+          <a:p>
+            <a:r>
+              <a:rPr lang="fr-FR" sz="1400" dirty="0" err="1">
+                <a:solidFill>
+                  <a:schemeClr val="bg1"/>
+                </a:solidFill>
+                <a:latin typeface="Courier"/>
+                <a:cs typeface="Courier"/>
+              </a:rPr>
+              <a:t>qqplot</a:t>
+            </a:r>
+            <a:r>
+              <a:rPr lang="fr-FR" sz="1400" dirty="0">
+                <a:solidFill>
+                  <a:schemeClr val="bg1"/>
+                </a:solidFill>
+                <a:latin typeface="Courier"/>
+                <a:cs typeface="Courier"/>
+              </a:rPr>
+              <a:t>(</a:t>
+            </a:r>
+            <a:r>
+              <a:rPr lang="fr-FR" sz="1400" dirty="0" err="1">
+                <a:solidFill>
+                  <a:schemeClr val="bg1"/>
+                </a:solidFill>
+                <a:latin typeface="Courier"/>
+                <a:cs typeface="Courier"/>
+              </a:rPr>
+              <a:t>st,rm</a:t>
+            </a:r>
+            <a:r>
+              <a:rPr lang="fr-FR" sz="1400" dirty="0">
+                <a:solidFill>
+                  <a:schemeClr val="bg1"/>
+                </a:solidFill>
+                <a:latin typeface="Courier"/>
+                <a:cs typeface="Courier"/>
+              </a:rPr>
+              <a:t>, main=</a:t>
+            </a:r>
+            <a:r>
+              <a:rPr lang="fr-FR" sz="1400" dirty="0">
+                <a:solidFill>
+                  <a:srgbClr val="00B050"/>
+                </a:solidFill>
+                <a:latin typeface="Courier"/>
+                <a:cs typeface="Courier"/>
+              </a:rPr>
+              <a:t>"QQ-plot st vs. </a:t>
+            </a:r>
+            <a:r>
+              <a:rPr lang="fr-FR" sz="1400" dirty="0" err="1">
+                <a:solidFill>
+                  <a:srgbClr val="00B050"/>
+                </a:solidFill>
+                <a:latin typeface="Courier"/>
+                <a:cs typeface="Courier"/>
+              </a:rPr>
+              <a:t>rm</a:t>
+            </a:r>
+            <a:r>
+              <a:rPr lang="fr-FR" sz="1400" dirty="0">
+                <a:solidFill>
+                  <a:srgbClr val="00B050"/>
+                </a:solidFill>
+                <a:latin typeface="Courier"/>
+                <a:cs typeface="Courier"/>
+              </a:rPr>
+              <a:t>"</a:t>
+            </a:r>
+            <a:r>
+              <a:rPr lang="fr-FR" sz="1400" dirty="0">
+                <a:solidFill>
+                  <a:schemeClr val="bg1"/>
+                </a:solidFill>
+                <a:latin typeface="Courier"/>
+                <a:cs typeface="Courier"/>
+              </a:rPr>
+              <a:t>)</a:t>
+            </a:r>
+          </a:p>
+          <a:p>
+            <a:r>
+              <a:rPr lang="fr-FR" sz="1400" dirty="0" err="1">
+                <a:solidFill>
+                  <a:schemeClr val="bg1"/>
+                </a:solidFill>
+                <a:latin typeface="Courier"/>
+                <a:cs typeface="Courier"/>
+              </a:rPr>
+              <a:t>abline</a:t>
+            </a:r>
+            <a:r>
+              <a:rPr lang="fr-FR" sz="1400" dirty="0">
+                <a:solidFill>
+                  <a:schemeClr val="bg1"/>
+                </a:solidFill>
+                <a:latin typeface="Courier"/>
+                <a:cs typeface="Courier"/>
+              </a:rPr>
+              <a:t>(a = 0, b = 1)</a:t>
+            </a:r>
+          </a:p>
+          <a:p>
+            <a:endParaRPr lang="fr-FR" sz="1400" dirty="0">
+              <a:solidFill>
+                <a:schemeClr val="bg1"/>
+              </a:solidFill>
+              <a:latin typeface="Courier"/>
+              <a:cs typeface="Courier"/>
+            </a:endParaRPr>
+          </a:p>
+          <a:p>
+            <a:r>
+              <a:rPr lang="fr-FR" sz="1400" dirty="0">
+                <a:solidFill>
+                  <a:srgbClr val="FFFF00"/>
+                </a:solidFill>
+                <a:latin typeface="Courier"/>
+                <a:cs typeface="Courier"/>
+              </a:rPr>
+              <a:t># Data </a:t>
+            </a:r>
+            <a:r>
+              <a:rPr lang="fr-FR" sz="1400" dirty="0" err="1">
+                <a:solidFill>
+                  <a:srgbClr val="FFFF00"/>
+                </a:solidFill>
+                <a:latin typeface="Courier"/>
+                <a:cs typeface="Courier"/>
+              </a:rPr>
+              <a:t>CDFs</a:t>
+            </a:r>
+            <a:r>
+              <a:rPr lang="fr-FR" sz="1400" dirty="0">
+                <a:solidFill>
+                  <a:srgbClr val="FFFF00"/>
+                </a:solidFill>
+                <a:latin typeface="Courier"/>
+                <a:cs typeface="Courier"/>
+              </a:rPr>
+              <a:t>:</a:t>
+            </a:r>
+          </a:p>
+          <a:p>
+            <a:r>
+              <a:rPr lang="fr-FR" sz="1400" dirty="0" err="1">
+                <a:solidFill>
+                  <a:schemeClr val="bg1"/>
+                </a:solidFill>
+                <a:latin typeface="Courier"/>
+                <a:cs typeface="Courier"/>
+              </a:rPr>
+              <a:t>Fx.st</a:t>
+            </a:r>
+            <a:r>
+              <a:rPr lang="fr-FR" sz="1400" dirty="0">
+                <a:solidFill>
+                  <a:schemeClr val="bg1"/>
+                </a:solidFill>
+                <a:latin typeface="Courier"/>
+                <a:cs typeface="Courier"/>
+              </a:rPr>
+              <a:t> &lt;- </a:t>
+            </a:r>
+            <a:r>
+              <a:rPr lang="fr-FR" sz="1400" dirty="0" err="1">
+                <a:solidFill>
+                  <a:schemeClr val="bg1"/>
+                </a:solidFill>
+                <a:latin typeface="Courier"/>
+                <a:cs typeface="Courier"/>
+              </a:rPr>
+              <a:t>ecdf</a:t>
+            </a:r>
+            <a:r>
+              <a:rPr lang="fr-FR" sz="1400" dirty="0">
+                <a:solidFill>
+                  <a:schemeClr val="bg1"/>
+                </a:solidFill>
+                <a:latin typeface="Courier"/>
+                <a:cs typeface="Courier"/>
+              </a:rPr>
+              <a:t>(st)</a:t>
+            </a:r>
+          </a:p>
+          <a:p>
+            <a:r>
+              <a:rPr lang="fr-FR" sz="1400" dirty="0" err="1">
+                <a:solidFill>
+                  <a:schemeClr val="bg1"/>
+                </a:solidFill>
+                <a:latin typeface="Courier"/>
+                <a:cs typeface="Courier"/>
+              </a:rPr>
+              <a:t>Fx.rm</a:t>
+            </a:r>
+            <a:r>
+              <a:rPr lang="fr-FR" sz="1400" dirty="0">
+                <a:solidFill>
+                  <a:schemeClr val="bg1"/>
+                </a:solidFill>
+                <a:latin typeface="Courier"/>
+                <a:cs typeface="Courier"/>
+              </a:rPr>
+              <a:t> &lt;- </a:t>
+            </a:r>
+            <a:r>
+              <a:rPr lang="fr-FR" sz="1400" dirty="0" err="1">
+                <a:solidFill>
+                  <a:schemeClr val="bg1"/>
+                </a:solidFill>
+                <a:latin typeface="Courier"/>
+                <a:cs typeface="Courier"/>
+              </a:rPr>
+              <a:t>ecdf</a:t>
+            </a:r>
+            <a:r>
+              <a:rPr lang="fr-FR" sz="1400" dirty="0">
+                <a:solidFill>
+                  <a:schemeClr val="bg1"/>
+                </a:solidFill>
+                <a:latin typeface="Courier"/>
+                <a:cs typeface="Courier"/>
+              </a:rPr>
+              <a:t>(</a:t>
+            </a:r>
+            <a:r>
+              <a:rPr lang="fr-FR" sz="1400" dirty="0" err="1">
+                <a:solidFill>
+                  <a:schemeClr val="bg1"/>
+                </a:solidFill>
+                <a:latin typeface="Courier"/>
+                <a:cs typeface="Courier"/>
+              </a:rPr>
+              <a:t>rm</a:t>
+            </a:r>
+            <a:r>
+              <a:rPr lang="fr-FR" sz="1400" dirty="0">
+                <a:solidFill>
+                  <a:schemeClr val="bg1"/>
+                </a:solidFill>
+                <a:latin typeface="Courier"/>
+                <a:cs typeface="Courier"/>
+              </a:rPr>
+              <a:t>)</a:t>
+            </a:r>
+          </a:p>
+          <a:p>
+            <a:r>
+              <a:rPr lang="fr-FR" sz="1400" dirty="0">
+                <a:solidFill>
+                  <a:schemeClr val="bg1"/>
+                </a:solidFill>
+                <a:latin typeface="Courier"/>
+                <a:cs typeface="Courier"/>
+              </a:rPr>
+              <a:t>plot(</a:t>
+            </a:r>
+            <a:r>
+              <a:rPr lang="fr-FR" sz="1400" dirty="0" err="1">
+                <a:solidFill>
+                  <a:schemeClr val="bg1"/>
+                </a:solidFill>
+                <a:latin typeface="Courier"/>
+                <a:cs typeface="Courier"/>
+              </a:rPr>
+              <a:t>Fx.st</a:t>
+            </a:r>
+            <a:r>
+              <a:rPr lang="fr-FR" sz="1400" dirty="0">
+                <a:solidFill>
+                  <a:schemeClr val="bg1"/>
+                </a:solidFill>
+                <a:latin typeface="Courier"/>
+                <a:cs typeface="Courier"/>
+              </a:rPr>
+              <a:t>)</a:t>
+            </a:r>
+          </a:p>
+          <a:p>
+            <a:r>
+              <a:rPr lang="fr-FR" sz="1400" dirty="0">
+                <a:solidFill>
+                  <a:schemeClr val="bg1"/>
+                </a:solidFill>
+                <a:latin typeface="Courier"/>
+                <a:cs typeface="Courier"/>
+              </a:rPr>
+              <a:t>plot(</a:t>
+            </a:r>
+            <a:r>
+              <a:rPr lang="fr-FR" sz="1400" dirty="0" err="1">
+                <a:solidFill>
+                  <a:schemeClr val="bg1"/>
+                </a:solidFill>
+                <a:latin typeface="Courier"/>
+                <a:cs typeface="Courier"/>
+              </a:rPr>
+              <a:t>Fx.rm</a:t>
+            </a:r>
+            <a:r>
+              <a:rPr lang="fr-FR" sz="1400" dirty="0">
+                <a:solidFill>
+                  <a:schemeClr val="bg1"/>
+                </a:solidFill>
+                <a:latin typeface="Courier"/>
+                <a:cs typeface="Courier"/>
+              </a:rPr>
+              <a:t>)</a:t>
+            </a:r>
+          </a:p>
+          <a:p>
+            <a:endParaRPr lang="fr-FR" sz="1400" dirty="0">
+              <a:solidFill>
+                <a:schemeClr val="bg1"/>
+              </a:solidFill>
+              <a:latin typeface="Courier"/>
+              <a:cs typeface="Courier"/>
+            </a:endParaRPr>
+          </a:p>
+          <a:p>
+            <a:r>
+              <a:rPr lang="fr-FR" sz="1400" dirty="0">
+                <a:solidFill>
+                  <a:srgbClr val="FFFF00"/>
+                </a:solidFill>
+                <a:latin typeface="Courier"/>
+                <a:cs typeface="Courier"/>
+              </a:rPr>
+              <a:t># Overlay to </a:t>
+            </a:r>
+            <a:r>
+              <a:rPr lang="fr-FR" sz="1400" dirty="0" err="1">
+                <a:solidFill>
+                  <a:srgbClr val="FFFF00"/>
+                </a:solidFill>
+                <a:latin typeface="Courier"/>
+                <a:cs typeface="Courier"/>
+              </a:rPr>
+              <a:t>ecdfs</a:t>
+            </a:r>
+            <a:r>
+              <a:rPr lang="fr-FR" sz="1400" dirty="0">
+                <a:solidFill>
+                  <a:srgbClr val="FFFF00"/>
+                </a:solidFill>
+                <a:latin typeface="Courier"/>
+                <a:cs typeface="Courier"/>
+              </a:rPr>
+              <a:t> compare </a:t>
+            </a:r>
+            <a:r>
+              <a:rPr lang="fr-FR" sz="1400" dirty="0" err="1">
+                <a:solidFill>
+                  <a:srgbClr val="FFFF00"/>
+                </a:solidFill>
+                <a:latin typeface="Courier"/>
+                <a:cs typeface="Courier"/>
+              </a:rPr>
+              <a:t>also</a:t>
+            </a:r>
+            <a:r>
+              <a:rPr lang="fr-FR" sz="1400" dirty="0">
+                <a:solidFill>
+                  <a:srgbClr val="FFFF00"/>
+                </a:solidFill>
+                <a:latin typeface="Courier"/>
+                <a:cs typeface="Courier"/>
+              </a:rPr>
+              <a:t>:</a:t>
+            </a:r>
+          </a:p>
+          <a:p>
+            <a:r>
+              <a:rPr lang="fr-FR" sz="1400" dirty="0">
+                <a:solidFill>
+                  <a:schemeClr val="bg1"/>
+                </a:solidFill>
+                <a:latin typeface="Courier"/>
+                <a:cs typeface="Courier"/>
+              </a:rPr>
+              <a:t>plot(</a:t>
+            </a:r>
+            <a:r>
+              <a:rPr lang="fr-FR" sz="1400" dirty="0" err="1">
+                <a:solidFill>
+                  <a:schemeClr val="bg1"/>
+                </a:solidFill>
+                <a:latin typeface="Courier"/>
+                <a:cs typeface="Courier"/>
+              </a:rPr>
+              <a:t>Fx.st</a:t>
+            </a:r>
+            <a:r>
+              <a:rPr lang="fr-FR" sz="1400" dirty="0">
+                <a:solidFill>
+                  <a:schemeClr val="bg1"/>
+                </a:solidFill>
+                <a:latin typeface="Courier"/>
+                <a:cs typeface="Courier"/>
+              </a:rPr>
+              <a:t>, </a:t>
+            </a:r>
+            <a:r>
+              <a:rPr lang="fr-FR" sz="1400" dirty="0" err="1">
+                <a:solidFill>
+                  <a:schemeClr val="bg1"/>
+                </a:solidFill>
+                <a:latin typeface="Courier"/>
+                <a:cs typeface="Courier"/>
+              </a:rPr>
+              <a:t>xlim</a:t>
+            </a:r>
+            <a:r>
+              <a:rPr lang="fr-FR" sz="1400" dirty="0">
+                <a:solidFill>
+                  <a:schemeClr val="bg1"/>
+                </a:solidFill>
+                <a:latin typeface="Courier"/>
+                <a:cs typeface="Courier"/>
+              </a:rPr>
+              <a:t>=c(2,4.5))</a:t>
+            </a:r>
+          </a:p>
+          <a:p>
+            <a:r>
+              <a:rPr lang="fr-FR" sz="1400" dirty="0">
+                <a:solidFill>
+                  <a:schemeClr val="bg1"/>
+                </a:solidFill>
+                <a:latin typeface="Courier"/>
+                <a:cs typeface="Courier"/>
+              </a:rPr>
+              <a:t>par(new=</a:t>
+            </a:r>
+            <a:r>
+              <a:rPr lang="fr-FR" sz="1400" dirty="0" err="1">
+                <a:solidFill>
+                  <a:schemeClr val="bg1"/>
+                </a:solidFill>
+                <a:latin typeface="Courier"/>
+                <a:cs typeface="Courier"/>
+              </a:rPr>
+              <a:t>T</a:t>
+            </a:r>
+            <a:r>
+              <a:rPr lang="fr-FR" sz="1400" dirty="0">
+                <a:solidFill>
+                  <a:schemeClr val="bg1"/>
+                </a:solidFill>
+                <a:latin typeface="Courier"/>
+                <a:cs typeface="Courier"/>
+              </a:rPr>
+              <a:t>)</a:t>
+            </a:r>
+          </a:p>
+          <a:p>
+            <a:r>
+              <a:rPr lang="fr-FR" sz="1400" dirty="0">
+                <a:solidFill>
+                  <a:schemeClr val="bg1"/>
+                </a:solidFill>
+                <a:latin typeface="Courier"/>
+                <a:cs typeface="Courier"/>
+              </a:rPr>
+              <a:t>plot(</a:t>
+            </a:r>
+            <a:r>
+              <a:rPr lang="fr-FR" sz="1400" dirty="0" err="1">
+                <a:solidFill>
+                  <a:schemeClr val="bg1"/>
+                </a:solidFill>
+                <a:latin typeface="Courier"/>
+                <a:cs typeface="Courier"/>
+              </a:rPr>
+              <a:t>Fx.rm</a:t>
+            </a:r>
+            <a:r>
+              <a:rPr lang="fr-FR" sz="1400" dirty="0">
+                <a:solidFill>
+                  <a:schemeClr val="bg1"/>
+                </a:solidFill>
+                <a:latin typeface="Courier"/>
+                <a:cs typeface="Courier"/>
+              </a:rPr>
+              <a:t>, </a:t>
+            </a:r>
+            <a:r>
+              <a:rPr lang="fr-FR" sz="1400" dirty="0" err="1">
+                <a:solidFill>
+                  <a:schemeClr val="bg1"/>
+                </a:solidFill>
+                <a:latin typeface="Courier"/>
+                <a:cs typeface="Courier"/>
+              </a:rPr>
+              <a:t>xlim</a:t>
+            </a:r>
+            <a:r>
+              <a:rPr lang="fr-FR" sz="1400" dirty="0">
+                <a:solidFill>
+                  <a:schemeClr val="bg1"/>
+                </a:solidFill>
+                <a:latin typeface="Courier"/>
+                <a:cs typeface="Courier"/>
+              </a:rPr>
+              <a:t>=c(2,4.5), col=</a:t>
+            </a:r>
+            <a:r>
+              <a:rPr lang="fr-FR" sz="1400" dirty="0">
+                <a:solidFill>
+                  <a:schemeClr val="accent6"/>
+                </a:solidFill>
+                <a:latin typeface="Courier"/>
+                <a:cs typeface="Courier"/>
+              </a:rPr>
+              <a:t>"green"</a:t>
+            </a:r>
+            <a:r>
+              <a:rPr lang="fr-FR" sz="1400" dirty="0">
+                <a:solidFill>
+                  <a:schemeClr val="bg1"/>
+                </a:solidFill>
+                <a:latin typeface="Courier"/>
+                <a:cs typeface="Courier"/>
+              </a:rPr>
+              <a:t>)</a:t>
+            </a:r>
+          </a:p>
+        </p:txBody>
+      </p:sp>
+      <p:pic>
+        <p:nvPicPr>
+          <p:cNvPr id="6" name="Picture 5">
+            <a:extLst>
+              <a:ext uri="{FF2B5EF4-FFF2-40B4-BE49-F238E27FC236}">
+                <a16:creationId xmlns:a16="http://schemas.microsoft.com/office/drawing/2014/main" id="{070039D6-F459-5AF1-0576-1782E334E36A}"/>
+              </a:ext>
+            </a:extLst>
+          </p:cNvPr>
+          <p:cNvPicPr>
+            <a:picLocks noChangeAspect="1"/>
+          </p:cNvPicPr>
+          <p:nvPr/>
+        </p:nvPicPr>
+        <p:blipFill>
+          <a:blip r:embed="rId3"/>
+          <a:stretch>
+            <a:fillRect/>
+          </a:stretch>
+        </p:blipFill>
+        <p:spPr>
+          <a:xfrm>
+            <a:off x="5840730" y="1960581"/>
+            <a:ext cx="1165860" cy="1470660"/>
+          </a:xfrm>
+          <a:prstGeom prst="rect">
+            <a:avLst/>
+          </a:prstGeom>
+        </p:spPr>
+      </p:pic>
+      <p:pic>
+        <p:nvPicPr>
+          <p:cNvPr id="7" name="Picture 6">
+            <a:extLst>
+              <a:ext uri="{FF2B5EF4-FFF2-40B4-BE49-F238E27FC236}">
+                <a16:creationId xmlns:a16="http://schemas.microsoft.com/office/drawing/2014/main" id="{49E737EF-0403-DC95-568E-0EE8BF435E83}"/>
+              </a:ext>
+            </a:extLst>
+          </p:cNvPr>
+          <p:cNvPicPr>
+            <a:picLocks noChangeAspect="1"/>
+          </p:cNvPicPr>
+          <p:nvPr/>
+        </p:nvPicPr>
+        <p:blipFill>
+          <a:blip r:embed="rId4"/>
+          <a:stretch>
+            <a:fillRect/>
+          </a:stretch>
+        </p:blipFill>
+        <p:spPr>
+          <a:xfrm>
+            <a:off x="7246620" y="1960581"/>
+            <a:ext cx="1165860" cy="1470660"/>
+          </a:xfrm>
+          <a:prstGeom prst="rect">
+            <a:avLst/>
+          </a:prstGeom>
+        </p:spPr>
+      </p:pic>
+      <p:pic>
+        <p:nvPicPr>
+          <p:cNvPr id="8" name="Picture 7">
+            <a:extLst>
+              <a:ext uri="{FF2B5EF4-FFF2-40B4-BE49-F238E27FC236}">
+                <a16:creationId xmlns:a16="http://schemas.microsoft.com/office/drawing/2014/main" id="{A85B0EE6-4FDC-910F-9CDF-BB835AB978AE}"/>
+              </a:ext>
+            </a:extLst>
+          </p:cNvPr>
+          <p:cNvPicPr>
+            <a:picLocks noChangeAspect="1"/>
+          </p:cNvPicPr>
+          <p:nvPr/>
+        </p:nvPicPr>
+        <p:blipFill>
+          <a:blip r:embed="rId5"/>
+          <a:stretch>
+            <a:fillRect/>
+          </a:stretch>
+        </p:blipFill>
+        <p:spPr>
+          <a:xfrm>
+            <a:off x="6420132" y="3510774"/>
+            <a:ext cx="1420848" cy="1420848"/>
+          </a:xfrm>
+          <a:prstGeom prst="rect">
+            <a:avLst/>
+          </a:prstGeom>
+        </p:spPr>
+      </p:pic>
+      <p:pic>
+        <p:nvPicPr>
+          <p:cNvPr id="9" name="Picture 8">
+            <a:extLst>
+              <a:ext uri="{FF2B5EF4-FFF2-40B4-BE49-F238E27FC236}">
+                <a16:creationId xmlns:a16="http://schemas.microsoft.com/office/drawing/2014/main" id="{D8C04BD2-4C41-F3B8-7A21-9AADDEA51F0D}"/>
+              </a:ext>
+            </a:extLst>
+          </p:cNvPr>
+          <p:cNvPicPr>
+            <a:picLocks noChangeAspect="1"/>
+          </p:cNvPicPr>
+          <p:nvPr/>
+        </p:nvPicPr>
+        <p:blipFill>
+          <a:blip r:embed="rId6"/>
+          <a:stretch>
+            <a:fillRect/>
+          </a:stretch>
+        </p:blipFill>
+        <p:spPr>
+          <a:xfrm>
+            <a:off x="6420132" y="5113446"/>
+            <a:ext cx="1420849" cy="1420849"/>
+          </a:xfrm>
+          <a:prstGeom prst="rect">
+            <a:avLst/>
+          </a:prstGeom>
+        </p:spPr>
+      </p:pic>
+    </p:spTree>
+    <p:extLst>
+      <p:ext uri="{BB962C8B-B14F-4D97-AF65-F5344CB8AC3E}">
+        <p14:creationId xmlns:p14="http://schemas.microsoft.com/office/powerpoint/2010/main" val="1694083310"/>
+      </p:ext>
+    </p:extLst>
+  </p:cSld>
+  <p:clrMapOvr>
+    <a:masterClrMapping/>
+  </p:clrMapOvr>
+  <p:timing>
+    <p:tnLst>
+      <p:par>
+        <p:cTn id="1" dur="indefinite" restart="never" nodeType="tmRoot">
+          <p:childTnLst>
+            <p:seq concurrent="1" nextAc="seek">
+              <p:cTn id="2" dur="indefinite" nodeType="mainSeq">
+                <p:childTnLst>
+                  <p:par>
+                    <p:cTn id="3" fill="hold">
+                      <p:stCondLst>
+                        <p:cond delay="indefinite"/>
+                      </p:stCondLst>
+                      <p:childTnLst>
+                        <p:par>
+                          <p:cTn id="4" fill="hold">
+                            <p:stCondLst>
+                              <p:cond delay="0"/>
+                            </p:stCondLst>
+                            <p:childTnLst>
+                              <p:par>
+                                <p:cTn id="5" presetID="2" presetClass="entr" presetSubtype="4" fill="hold" nodeType="clickEffect">
+                                  <p:stCondLst>
+                                    <p:cond delay="0"/>
+                                  </p:stCondLst>
+                                  <p:childTnLst>
+                                    <p:set>
+                                      <p:cBhvr>
+                                        <p:cTn id="6" dur="1" fill="hold">
+                                          <p:stCondLst>
+                                            <p:cond delay="0"/>
+                                          </p:stCondLst>
+                                        </p:cTn>
+                                        <p:tgtEl>
+                                          <p:spTgt spid="6"/>
+                                        </p:tgtEl>
+                                        <p:attrNameLst>
+                                          <p:attrName>style.visibility</p:attrName>
+                                        </p:attrNameLst>
+                                      </p:cBhvr>
+                                      <p:to>
+                                        <p:strVal val="visible"/>
+                                      </p:to>
+                                    </p:set>
+                                    <p:anim calcmode="lin" valueType="num">
+                                      <p:cBhvr additive="base">
+                                        <p:cTn id="7" dur="500" fill="hold"/>
+                                        <p:tgtEl>
+                                          <p:spTgt spid="6"/>
+                                        </p:tgtEl>
+                                        <p:attrNameLst>
+                                          <p:attrName>ppt_x</p:attrName>
+                                        </p:attrNameLst>
+                                      </p:cBhvr>
+                                      <p:tavLst>
+                                        <p:tav tm="0">
+                                          <p:val>
+                                            <p:strVal val="#ppt_x"/>
+                                          </p:val>
+                                        </p:tav>
+                                        <p:tav tm="100000">
+                                          <p:val>
+                                            <p:strVal val="#ppt_x"/>
+                                          </p:val>
+                                        </p:tav>
+                                      </p:tavLst>
+                                    </p:anim>
+                                    <p:anim calcmode="lin" valueType="num">
+                                      <p:cBhvr additive="base">
+                                        <p:cTn id="8" dur="500" fill="hold"/>
+                                        <p:tgtEl>
+                                          <p:spTgt spid="6"/>
+                                        </p:tgtEl>
+                                        <p:attrNameLst>
+                                          <p:attrName>ppt_y</p:attrName>
+                                        </p:attrNameLst>
+                                      </p:cBhvr>
+                                      <p:tavLst>
+                                        <p:tav tm="0">
+                                          <p:val>
+                                            <p:strVal val="1+#ppt_h/2"/>
+                                          </p:val>
+                                        </p:tav>
+                                        <p:tav tm="100000">
+                                          <p:val>
+                                            <p:strVal val="#ppt_y"/>
+                                          </p:val>
+                                        </p:tav>
+                                      </p:tavLst>
+                                    </p:anim>
+                                  </p:childTnLst>
+                                </p:cTn>
+                              </p:par>
+                              <p:par>
+                                <p:cTn id="9" presetID="2" presetClass="entr" presetSubtype="4" fill="hold" nodeType="withEffect">
+                                  <p:stCondLst>
+                                    <p:cond delay="0"/>
+                                  </p:stCondLst>
+                                  <p:childTnLst>
+                                    <p:set>
+                                      <p:cBhvr>
+                                        <p:cTn id="10" dur="1" fill="hold">
+                                          <p:stCondLst>
+                                            <p:cond delay="0"/>
+                                          </p:stCondLst>
+                                        </p:cTn>
+                                        <p:tgtEl>
+                                          <p:spTgt spid="7"/>
+                                        </p:tgtEl>
+                                        <p:attrNameLst>
+                                          <p:attrName>style.visibility</p:attrName>
+                                        </p:attrNameLst>
+                                      </p:cBhvr>
+                                      <p:to>
+                                        <p:strVal val="visible"/>
+                                      </p:to>
+                                    </p:set>
+                                    <p:anim calcmode="lin" valueType="num">
+                                      <p:cBhvr additive="base">
+                                        <p:cTn id="11" dur="500" fill="hold"/>
+                                        <p:tgtEl>
+                                          <p:spTgt spid="7"/>
+                                        </p:tgtEl>
+                                        <p:attrNameLst>
+                                          <p:attrName>ppt_x</p:attrName>
+                                        </p:attrNameLst>
+                                      </p:cBhvr>
+                                      <p:tavLst>
+                                        <p:tav tm="0">
+                                          <p:val>
+                                            <p:strVal val="#ppt_x"/>
+                                          </p:val>
+                                        </p:tav>
+                                        <p:tav tm="100000">
+                                          <p:val>
+                                            <p:strVal val="#ppt_x"/>
+                                          </p:val>
+                                        </p:tav>
+                                      </p:tavLst>
+                                    </p:anim>
+                                    <p:anim calcmode="lin" valueType="num">
+                                      <p:cBhvr additive="base">
+                                        <p:cTn id="12" dur="500" fill="hold"/>
+                                        <p:tgtEl>
+                                          <p:spTgt spid="7"/>
+                                        </p:tgtEl>
+                                        <p:attrNameLst>
+                                          <p:attrName>ppt_y</p:attrName>
+                                        </p:attrNameLst>
+                                      </p:cBhvr>
+                                      <p:tavLst>
+                                        <p:tav tm="0">
+                                          <p:val>
+                                            <p:strVal val="1+#ppt_h/2"/>
+                                          </p:val>
+                                        </p:tav>
+                                        <p:tav tm="100000">
+                                          <p:val>
+                                            <p:strVal val="#ppt_y"/>
+                                          </p:val>
+                                        </p:tav>
+                                      </p:tavLst>
+                                    </p:anim>
+                                  </p:childTnLst>
+                                </p:cTn>
+                              </p:par>
+                              <p:par>
+                                <p:cTn id="13" presetID="2" presetClass="entr" presetSubtype="4" fill="hold" nodeType="withEffect">
+                                  <p:stCondLst>
+                                    <p:cond delay="0"/>
+                                  </p:stCondLst>
+                                  <p:childTnLst>
+                                    <p:set>
+                                      <p:cBhvr>
+                                        <p:cTn id="14" dur="1" fill="hold">
+                                          <p:stCondLst>
+                                            <p:cond delay="0"/>
+                                          </p:stCondLst>
+                                        </p:cTn>
+                                        <p:tgtEl>
+                                          <p:spTgt spid="8"/>
+                                        </p:tgtEl>
+                                        <p:attrNameLst>
+                                          <p:attrName>style.visibility</p:attrName>
+                                        </p:attrNameLst>
+                                      </p:cBhvr>
+                                      <p:to>
+                                        <p:strVal val="visible"/>
+                                      </p:to>
+                                    </p:set>
+                                    <p:anim calcmode="lin" valueType="num">
+                                      <p:cBhvr additive="base">
+                                        <p:cTn id="15" dur="500" fill="hold"/>
+                                        <p:tgtEl>
+                                          <p:spTgt spid="8"/>
+                                        </p:tgtEl>
+                                        <p:attrNameLst>
+                                          <p:attrName>ppt_x</p:attrName>
+                                        </p:attrNameLst>
+                                      </p:cBhvr>
+                                      <p:tavLst>
+                                        <p:tav tm="0">
+                                          <p:val>
+                                            <p:strVal val="#ppt_x"/>
+                                          </p:val>
+                                        </p:tav>
+                                        <p:tav tm="100000">
+                                          <p:val>
+                                            <p:strVal val="#ppt_x"/>
+                                          </p:val>
+                                        </p:tav>
+                                      </p:tavLst>
+                                    </p:anim>
+                                    <p:anim calcmode="lin" valueType="num">
+                                      <p:cBhvr additive="base">
+                                        <p:cTn id="16" dur="500" fill="hold"/>
+                                        <p:tgtEl>
+                                          <p:spTgt spid="8"/>
+                                        </p:tgtEl>
+                                        <p:attrNameLst>
+                                          <p:attrName>ppt_y</p:attrName>
+                                        </p:attrNameLst>
+                                      </p:cBhvr>
+                                      <p:tavLst>
+                                        <p:tav tm="0">
+                                          <p:val>
+                                            <p:strVal val="1+#ppt_h/2"/>
+                                          </p:val>
+                                        </p:tav>
+                                        <p:tav tm="100000">
+                                          <p:val>
+                                            <p:strVal val="#ppt_y"/>
+                                          </p:val>
+                                        </p:tav>
+                                      </p:tavLst>
+                                    </p:anim>
+                                  </p:childTnLst>
+                                </p:cTn>
+                              </p:par>
+                              <p:par>
+                                <p:cTn id="17" presetID="2" presetClass="entr" presetSubtype="4" fill="hold" nodeType="withEffect">
+                                  <p:stCondLst>
+                                    <p:cond delay="0"/>
+                                  </p:stCondLst>
+                                  <p:childTnLst>
+                                    <p:set>
+                                      <p:cBhvr>
+                                        <p:cTn id="18" dur="1" fill="hold">
+                                          <p:stCondLst>
+                                            <p:cond delay="0"/>
+                                          </p:stCondLst>
+                                        </p:cTn>
+                                        <p:tgtEl>
+                                          <p:spTgt spid="9"/>
+                                        </p:tgtEl>
+                                        <p:attrNameLst>
+                                          <p:attrName>style.visibility</p:attrName>
+                                        </p:attrNameLst>
+                                      </p:cBhvr>
+                                      <p:to>
+                                        <p:strVal val="visible"/>
+                                      </p:to>
+                                    </p:set>
+                                    <p:anim calcmode="lin" valueType="num">
+                                      <p:cBhvr additive="base">
+                                        <p:cTn id="19" dur="500" fill="hold"/>
+                                        <p:tgtEl>
+                                          <p:spTgt spid="9"/>
+                                        </p:tgtEl>
+                                        <p:attrNameLst>
+                                          <p:attrName>ppt_x</p:attrName>
+                                        </p:attrNameLst>
+                                      </p:cBhvr>
+                                      <p:tavLst>
+                                        <p:tav tm="0">
+                                          <p:val>
+                                            <p:strVal val="#ppt_x"/>
+                                          </p:val>
+                                        </p:tav>
+                                        <p:tav tm="100000">
+                                          <p:val>
+                                            <p:strVal val="#ppt_x"/>
+                                          </p:val>
+                                        </p:tav>
+                                      </p:tavLst>
+                                    </p:anim>
+                                    <p:anim calcmode="lin" valueType="num">
+                                      <p:cBhvr additive="base">
+                                        <p:cTn id="20" dur="500" fill="hold"/>
+                                        <p:tgtEl>
+                                          <p:spTgt spid="9"/>
+                                        </p:tgtEl>
+                                        <p:attrNameLst>
+                                          <p:attrName>ppt_y</p:attrName>
+                                        </p:attrNameLst>
+                                      </p:cBhvr>
+                                      <p:tavLst>
+                                        <p:tav tm="0">
+                                          <p:val>
+                                            <p:strVal val="1+#ppt_h/2"/>
+                                          </p:val>
+                                        </p:tav>
+                                        <p:tav tm="100000">
+                                          <p:val>
+                                            <p:strVal val="#ppt_y"/>
+                                          </p:val>
+                                        </p:tav>
+                                      </p:tavLst>
+                                    </p:anim>
+                                  </p:childTnLst>
+                                </p:cTn>
+                              </p:par>
+                            </p:childTnLst>
+                          </p:cTn>
+                        </p:par>
+                      </p:childTnLst>
+                    </p:cTn>
+                  </p:par>
+                </p:childTnLst>
+              </p:cTn>
+              <p:prevCondLst>
+                <p:cond evt="onPrev" delay="0">
+                  <p:tgtEl>
+                    <p:sldTgt/>
+                  </p:tgtEl>
+                </p:cond>
+              </p:prevCondLst>
+              <p:nextCondLst>
+                <p:cond evt="onNext" delay="0">
+                  <p:tgtEl>
+                    <p:sldTgt/>
+                  </p:tgtEl>
+                </p:cond>
+              </p:nextCondLst>
+            </p:seq>
+          </p:childTnLst>
+        </p:cTn>
+      </p:par>
+    </p:tnLst>
   </p:timing>
 </p:sld>
 </file>

--- a/Laboratories/Lab3/pdf_cdf_tutorial_workshop.pptx
+++ b/Laboratories/Lab3/pdf_cdf_tutorial_workshop.pptx
@@ -5544,8 +5544,8 @@
         </p:nvSpPr>
         <p:spPr>
           <a:xfrm>
-            <a:off x="484188" y="2575143"/>
-            <a:ext cx="8091714" cy="2462213"/>
+            <a:off x="370500" y="2586573"/>
+            <a:ext cx="8450172" cy="2462213"/>
           </a:xfrm>
           <a:prstGeom prst="rect">
             <a:avLst/>
@@ -5565,7 +5565,7 @@
                 <a:latin typeface="Times New Roman"/>
                 <a:cs typeface="Times New Roman"/>
               </a:rPr>
-              <a:t>Plot the PMFs of the pellet spread at 10ft for the Stevens and Remington guns</a:t>
+              <a:t>Plot the PMFs of the pellet spread at 10ft for the Stevens and Remington guns.</a:t>
             </a:r>
           </a:p>
           <a:p>
@@ -5596,7 +5596,7 @@
                 <a:latin typeface="Times New Roman"/>
                 <a:cs typeface="Times New Roman"/>
               </a:rPr>
-              <a:t>ecdf’s</a:t>
+              <a:t>eCDFs</a:t>
             </a:r>
             <a:r>
               <a:rPr lang="en-US" sz="2200" dirty="0">
@@ -6942,6 +6942,51 @@
           </a:prstGeom>
         </p:spPr>
       </p:pic>
+      <p:sp>
+        <p:nvSpPr>
+          <p:cNvPr id="2" name="TextBox 1">
+            <a:extLst>
+              <a:ext uri="{FF2B5EF4-FFF2-40B4-BE49-F238E27FC236}">
+                <a16:creationId xmlns:a16="http://schemas.microsoft.com/office/drawing/2014/main" id="{8D168E90-A1AA-BFC9-271F-8EDE3F38A44D}"/>
+              </a:ext>
+            </a:extLst>
+          </p:cNvPr>
+          <p:cNvSpPr txBox="1"/>
+          <p:nvPr/>
+        </p:nvSpPr>
+        <p:spPr>
+          <a:xfrm>
+            <a:off x="3170078" y="4604328"/>
+            <a:ext cx="2653290" cy="400110"/>
+          </a:xfrm>
+          <a:prstGeom prst="rect">
+            <a:avLst/>
+          </a:prstGeom>
+          <a:solidFill>
+            <a:schemeClr val="bg1"/>
+          </a:solidFill>
+        </p:spPr>
+        <p:txBody>
+          <a:bodyPr wrap="none" rtlCol="0">
+            <a:spAutoFit/>
+          </a:bodyPr>
+          <a:lstStyle/>
+          <a:p>
+            <a:r>
+              <a:rPr lang="en-US" sz="2000" dirty="0">
+                <a:latin typeface="Times New Roman" panose="02020603050405020304" pitchFamily="18" charset="0"/>
+                <a:cs typeface="Times New Roman" panose="02020603050405020304" pitchFamily="18" charset="0"/>
+                <a:hlinkClick r:id="rId7"/>
+              </a:rPr>
+              <a:t>qqplot_ecdf_compare.R</a:t>
+            </a:r>
+            <a:endParaRPr lang="en-US" sz="2000" dirty="0">
+              <a:latin typeface="Times New Roman" panose="02020603050405020304" pitchFamily="18" charset="0"/>
+              <a:cs typeface="Times New Roman" panose="02020603050405020304" pitchFamily="18" charset="0"/>
+            </a:endParaRPr>
+          </a:p>
+        </p:txBody>
+      </p:sp>
     </p:spTree>
     <p:extLst>
       <p:ext uri="{BB962C8B-B14F-4D97-AF65-F5344CB8AC3E}">
@@ -7264,6 +7309,79 @@
                                   </p:childTnLst>
                                 </p:cTn>
                               </p:par>
+                              <p:par>
+                                <p:cTn id="21" presetID="2" presetClass="entr" presetSubtype="4" fill="hold" grpId="0" nodeType="withEffect">
+                                  <p:stCondLst>
+                                    <p:cond delay="0"/>
+                                  </p:stCondLst>
+                                  <p:childTnLst>
+                                    <p:set>
+                                      <p:cBhvr>
+                                        <p:cTn id="22" dur="1" fill="hold">
+                                          <p:stCondLst>
+                                            <p:cond delay="0"/>
+                                          </p:stCondLst>
+                                        </p:cTn>
+                                        <p:tgtEl>
+                                          <p:spTgt spid="2"/>
+                                        </p:tgtEl>
+                                        <p:attrNameLst>
+                                          <p:attrName>style.visibility</p:attrName>
+                                        </p:attrNameLst>
+                                      </p:cBhvr>
+                                      <p:to>
+                                        <p:strVal val="visible"/>
+                                      </p:to>
+                                    </p:set>
+                                    <p:anim calcmode="lin" valueType="num">
+                                      <p:cBhvr additive="base">
+                                        <p:cTn id="23" dur="500" fill="hold"/>
+                                        <p:tgtEl>
+                                          <p:spTgt spid="2"/>
+                                        </p:tgtEl>
+                                        <p:attrNameLst>
+                                          <p:attrName>ppt_x</p:attrName>
+                                        </p:attrNameLst>
+                                      </p:cBhvr>
+                                      <p:tavLst>
+                                        <p:tav tm="0">
+                                          <p:val>
+                                            <p:strVal val="#ppt_x"/>
+                                          </p:val>
+                                        </p:tav>
+                                        <p:tav tm="100000">
+                                          <p:val>
+                                            <p:strVal val="#ppt_x"/>
+                                          </p:val>
+                                        </p:tav>
+                                      </p:tavLst>
+                                    </p:anim>
+                                    <p:anim calcmode="lin" valueType="num">
+                                      <p:cBhvr additive="base">
+                                        <p:cTn id="24" dur="500" fill="hold"/>
+                                        <p:tgtEl>
+                                          <p:spTgt spid="2"/>
+                                        </p:tgtEl>
+                                        <p:attrNameLst>
+                                          <p:attrName>ppt_y</p:attrName>
+                                        </p:attrNameLst>
+                                      </p:cBhvr>
+                                      <p:tavLst>
+                                        <p:tav tm="0">
+                                          <p:val>
+                                            <p:strVal val="1+#ppt_h/2"/>
+                                          </p:val>
+                                        </p:tav>
+                                        <p:tav tm="100000">
+                                          <p:val>
+                                            <p:strVal val="#ppt_y"/>
+                                          </p:val>
+                                        </p:tav>
+                                      </p:tavLst>
+                                    </p:anim>
+                                  </p:childTnLst>
+                                </p:cTn>
+                              </p:par>
                             </p:childTnLst>
                           </p:cTn>
                         </p:par>
@@ -7291,6 +7409,9 @@
         </p:cTn>
       </p:par>
     </p:tnLst>
+    <p:bldLst>
+      <p:bldP spid="2" grpId="0"/>
+    </p:bldLst>
   </p:timing>
 </p:sld>
 </file>
